--- a/AI_for_Finance_Course/Slides/Class_11_Production_Deployment_MLOps.pptx
+++ b/AI_for_Finance_Course/Slides/Class_11_Production_Deployment_MLOps.pptx
@@ -499,6 +499,10 @@
           </p:nvPr>
         </p:nvSpPr>
         <p:spPr/>
+        <p:txBody>
+          <a:bodyPr/>
+          <a:p/>
+        </p:txBody>
       </p:sp>
       <p:sp>
         <p:nvSpPr>
@@ -587,6 +591,10 @@
           </p:nvPr>
         </p:nvSpPr>
         <p:spPr/>
+        <p:txBody>
+          <a:bodyPr/>
+          <a:p/>
+        </p:txBody>
       </p:sp>
       <p:sp>
         <p:nvSpPr>
@@ -675,6 +683,10 @@
           </p:nvPr>
         </p:nvSpPr>
         <p:spPr/>
+        <p:txBody>
+          <a:bodyPr/>
+          <a:p/>
+        </p:txBody>
       </p:sp>
       <p:sp>
         <p:nvSpPr>
@@ -763,6 +775,10 @@
           </p:nvPr>
         </p:nvSpPr>
         <p:spPr/>
+        <p:txBody>
+          <a:bodyPr/>
+          <a:p/>
+        </p:txBody>
       </p:sp>
       <p:sp>
         <p:nvSpPr>
@@ -851,6 +867,10 @@
           </p:nvPr>
         </p:nvSpPr>
         <p:spPr/>
+        <p:txBody>
+          <a:bodyPr/>
+          <a:p/>
+        </p:txBody>
       </p:sp>
       <p:sp>
         <p:nvSpPr>
@@ -939,6 +959,10 @@
           </p:nvPr>
         </p:nvSpPr>
         <p:spPr/>
+        <p:txBody>
+          <a:bodyPr/>
+          <a:p/>
+        </p:txBody>
       </p:sp>
       <p:sp>
         <p:nvSpPr>
@@ -1027,6 +1051,10 @@
           </p:nvPr>
         </p:nvSpPr>
         <p:spPr/>
+        <p:txBody>
+          <a:bodyPr/>
+          <a:p/>
+        </p:txBody>
       </p:sp>
       <p:sp>
         <p:nvSpPr>
@@ -1115,6 +1143,10 @@
           </p:nvPr>
         </p:nvSpPr>
         <p:spPr/>
+        <p:txBody>
+          <a:bodyPr/>
+          <a:p/>
+        </p:txBody>
       </p:sp>
       <p:sp>
         <p:nvSpPr>
@@ -1203,6 +1235,10 @@
           </p:nvPr>
         </p:nvSpPr>
         <p:spPr/>
+        <p:txBody>
+          <a:bodyPr/>
+          <a:p/>
+        </p:txBody>
       </p:sp>
       <p:sp>
         <p:nvSpPr>
@@ -1291,6 +1327,10 @@
           </p:nvPr>
         </p:nvSpPr>
         <p:spPr/>
+        <p:txBody>
+          <a:bodyPr/>
+          <a:p/>
+        </p:txBody>
       </p:sp>
       <p:sp>
         <p:nvSpPr>
@@ -1379,6 +1419,10 @@
           </p:nvPr>
         </p:nvSpPr>
         <p:spPr/>
+        <p:txBody>
+          <a:bodyPr/>
+          <a:p/>
+        </p:txBody>
       </p:sp>
       <p:sp>
         <p:nvSpPr>
@@ -1467,6 +1511,10 @@
           </p:nvPr>
         </p:nvSpPr>
         <p:spPr/>
+        <p:txBody>
+          <a:bodyPr/>
+          <a:p/>
+        </p:txBody>
       </p:sp>
       <p:sp>
         <p:nvSpPr>
@@ -1555,6 +1603,10 @@
           </p:nvPr>
         </p:nvSpPr>
         <p:spPr/>
+        <p:txBody>
+          <a:bodyPr/>
+          <a:p/>
+        </p:txBody>
       </p:sp>
       <p:sp>
         <p:nvSpPr>
@@ -1643,6 +1695,10 @@
           </p:nvPr>
         </p:nvSpPr>
         <p:spPr/>
+        <p:txBody>
+          <a:bodyPr/>
+          <a:p/>
+        </p:txBody>
       </p:sp>
       <p:sp>
         <p:nvSpPr>
@@ -1731,6 +1787,10 @@
           </p:nvPr>
         </p:nvSpPr>
         <p:spPr/>
+        <p:txBody>
+          <a:bodyPr/>
+          <a:p/>
+        </p:txBody>
       </p:sp>
       <p:sp>
         <p:nvSpPr>
@@ -1819,6 +1879,10 @@
           </p:nvPr>
         </p:nvSpPr>
         <p:spPr/>
+        <p:txBody>
+          <a:bodyPr/>
+          <a:p/>
+        </p:txBody>
       </p:sp>
       <p:sp>
         <p:nvSpPr>
@@ -2456,6 +2520,10 @@
           </a:solidFill>
           <a:ln/>
         </p:spPr>
+        <p:txBody>
+          <a:bodyPr/>
+          <a:p/>
+        </p:txBody>
       </p:sp>
       <p:sp>
         <p:nvSpPr>
@@ -2786,6 +2854,10 @@
           </a:solidFill>
           <a:ln/>
         </p:spPr>
+        <p:txBody>
+          <a:bodyPr/>
+          <a:p/>
+        </p:txBody>
       </p:sp>
       <p:sp>
         <p:nvSpPr>
@@ -3116,6 +3188,10 @@
           </a:solidFill>
           <a:ln/>
         </p:spPr>
+        <p:txBody>
+          <a:bodyPr/>
+          <a:p/>
+        </p:txBody>
       </p:sp>
       <p:sp>
         <p:nvSpPr>
@@ -3446,6 +3522,10 @@
           </a:solidFill>
           <a:ln/>
         </p:spPr>
+        <p:txBody>
+          <a:bodyPr/>
+          <a:p/>
+        </p:txBody>
       </p:sp>
       <p:sp>
         <p:nvSpPr>
@@ -3776,6 +3856,10 @@
           </a:solidFill>
           <a:ln/>
         </p:spPr>
+        <p:txBody>
+          <a:bodyPr/>
+          <a:p/>
+        </p:txBody>
       </p:sp>
       <p:sp>
         <p:nvSpPr>
@@ -4106,6 +4190,10 @@
           </a:solidFill>
           <a:ln/>
         </p:spPr>
+        <p:txBody>
+          <a:bodyPr/>
+          <a:p/>
+        </p:txBody>
       </p:sp>
       <p:sp>
         <p:nvSpPr>
@@ -4450,7 +4538,7 @@
                 <a:ea typeface="Calibri" pitchFamily="34" charset="-122"/>
                 <a:cs typeface="Calibri" pitchFamily="34" charset="-120"/>
               </a:rPr>
-              <a:t>Proxiant Academy — www.proxiant.com</a:t>
+              <a:t>Proxiant Academy | proxiant.ai</a:t>
             </a:r>
             <a:endParaRPr lang="en-US" sz="1400" dirty="0"/>
           </a:p>
@@ -4585,6 +4673,10 @@
           </a:solidFill>
           <a:ln/>
         </p:spPr>
+        <p:txBody>
+          <a:bodyPr/>
+          <a:p/>
+        </p:txBody>
       </p:sp>
       <p:sp>
         <p:nvSpPr>
@@ -4955,6 +5047,10 @@
           </a:solidFill>
           <a:ln/>
         </p:spPr>
+        <p:txBody>
+          <a:bodyPr/>
+          <a:p/>
+        </p:txBody>
       </p:sp>
       <p:sp>
         <p:nvSpPr>
@@ -5285,6 +5381,10 @@
           </a:solidFill>
           <a:ln/>
         </p:spPr>
+        <p:txBody>
+          <a:bodyPr/>
+          <a:p/>
+        </p:txBody>
       </p:sp>
       <p:sp>
         <p:nvSpPr>
@@ -5615,6 +5715,10 @@
           </a:solidFill>
           <a:ln/>
         </p:spPr>
+        <p:txBody>
+          <a:bodyPr/>
+          <a:p/>
+        </p:txBody>
       </p:sp>
       <p:sp>
         <p:nvSpPr>
@@ -5945,6 +6049,10 @@
           </a:solidFill>
           <a:ln/>
         </p:spPr>
+        <p:txBody>
+          <a:bodyPr/>
+          <a:p/>
+        </p:txBody>
       </p:sp>
       <p:sp>
         <p:nvSpPr>
@@ -6275,6 +6383,10 @@
           </a:solidFill>
           <a:ln/>
         </p:spPr>
+        <p:txBody>
+          <a:bodyPr/>
+          <a:p/>
+        </p:txBody>
       </p:sp>
       <p:sp>
         <p:nvSpPr>
@@ -6605,6 +6717,10 @@
           </a:solidFill>
           <a:ln/>
         </p:spPr>
+        <p:txBody>
+          <a:bodyPr/>
+          <a:p/>
+        </p:txBody>
       </p:sp>
       <p:sp>
         <p:nvSpPr>
@@ -6935,6 +7051,10 @@
           </a:solidFill>
           <a:ln/>
         </p:spPr>
+        <p:txBody>
+          <a:bodyPr/>
+          <a:p/>
+        </p:txBody>
       </p:sp>
       <p:sp>
         <p:nvSpPr>
